--- a/examples/ppt/charts/charts-bar.pptx
+++ b/examples/ppt/charts/charts-bar.pptx
@@ -5,14 +5,14 @@
     <p:sldMasterId xmlns:r="http://schemas.openxmlformats.org/officeDocument/2006/relationships" id="2147483648" r:id="rId1"/>
   </p:sldMasterIdLst>
   <p:sldIdLst>
-    <p:sldId id="256" r:id="R34299f8353ab43d5"/>
-    <p:sldId id="257" r:id="Rf7b1076ea6ce40fe"/>
-    <p:sldId id="258" r:id="R483c439261614d10"/>
-    <p:sldId id="259" r:id="R4e0935180998462c"/>
-    <p:sldId id="260" r:id="Rda0ea521ac4242d8"/>
-    <p:sldId id="261" r:id="Racc00fcf440e485b"/>
-    <p:sldId id="262" r:id="R6372d74b06994203"/>
-    <p:sldId id="263" r:id="R2a9239387c76417e"/>
+    <p:sldId id="256" r:id="Rb2a2fd4b2f67452a"/>
+    <p:sldId id="257" r:id="Ra127f68dd7ff429a"/>
+    <p:sldId id="258" r:id="Recc9dbe133e34c5d"/>
+    <p:sldId id="259" r:id="Re10f5ac8089d4595"/>
+    <p:sldId id="260" r:id="Rd6cd7491501847c4"/>
+    <p:sldId id="261" r:id="Rfce9a187626748a6"/>
+    <p:sldId id="262" r:id="R3aaf6d105a8b414a"/>
+    <p:sldId id="263" r:id="R42977a51556b4d1e"/>
   </p:sldIdLst>
   <p:sldSz cx="12192000" cy="6858000"/>
   <p:notesSz cx="6858000" cy="9144000"/>
@@ -287,7 +287,7 @@
 </file>
 
 <file path=ppt/slideMasters/slideMaster1.xml><?xml version="1.0" encoding="utf-8"?>
-<p:sldMaster xmlns:p="http://schemas.openxmlformats.org/presentationml/2006/main">
+<p:sldMaster xmlns:r="http://schemas.openxmlformats.org/officeDocument/2006/relationships" xmlns:p="http://schemas.openxmlformats.org/presentationml/2006/main">
   <p:cSld>
     <p:spTree>
       <p:nvGrpSpPr>
@@ -1055,10 +1055,12 @@
             <a:lstStyle xmlns:a="http://schemas.openxmlformats.org/drawingml/2006/main"/>
             <a:p xmlns:a="http://schemas.openxmlformats.org/drawingml/2006/main">
               <a:pPr>
-                <a:defRPr sz="1000" b="0">
+                <a:defRPr sz="1000">
                   <a:solidFill>
                     <a:srgbClr val="333333"/>
                   </a:solidFill>
+                  <a:latin typeface="Calibri"/>
+                  <a:ea typeface="Calibri"/>
                 </a:defRPr>
               </a:pPr>
             </a:p>
@@ -1193,10 +1195,12 @@
             <a:lstStyle xmlns:a="http://schemas.openxmlformats.org/drawingml/2006/main"/>
             <a:p xmlns:a="http://schemas.openxmlformats.org/drawingml/2006/main">
               <a:pPr>
-                <a:defRPr sz="900" b="0">
+                <a:defRPr sz="900">
                   <a:solidFill>
                     <a:srgbClr val="FFFFFF"/>
                   </a:solidFill>
+                  <a:latin typeface="Calibri"/>
+                  <a:ea typeface="Calibri"/>
                 </a:defRPr>
               </a:pPr>
             </a:p>
@@ -1425,10 +1429,12 @@
             <a:lstStyle xmlns:a="http://schemas.openxmlformats.org/drawingml/2006/main"/>
             <a:p xmlns:a="http://schemas.openxmlformats.org/drawingml/2006/main">
               <a:pPr>
-                <a:defRPr sz="900" b="0">
+                <a:defRPr sz="900">
                   <a:solidFill>
                     <a:srgbClr val="FFFFFF"/>
                   </a:solidFill>
+                  <a:latin typeface="Calibri"/>
+                  <a:ea typeface="Calibri"/>
                 </a:defRPr>
               </a:pPr>
             </a:p>
@@ -5845,8 +5851,8 @@
       <p:grpSpPr/>
       <p:sp>
         <p:nvSpPr>
-          <p:cNvPr id="10000" name="TextBox 1"/>
-          <p:cNvSpPr/>
+          <p:cNvPr id="100000" name="TextBox 1"/>
+          <p:cNvSpPr txBox="1"/>
           <p:nvPr/>
         </p:nvSpPr>
         <p:spPr>
@@ -5873,7 +5879,7 @@
       </p:sp>
       <p:graphicFrame>
         <p:nvGraphicFramePr>
-          <p:cNvPr id="10001" name="bar"/>
+          <p:cNvPr id="100001" name="bar"/>
           <p:cNvGraphicFramePr/>
           <p:nvPr/>
         </p:nvGraphicFramePr>
@@ -5883,13 +5889,13 @@
         </p:xfrm>
         <a:graphic xmlns:a="http://schemas.openxmlformats.org/drawingml/2006/main">
           <a:graphicData uri="http://schemas.openxmlformats.org/drawingml/2006/chart">
-            <c:chart xmlns:r="http://schemas.openxmlformats.org/officeDocument/2006/relationships" xmlns:c="http://schemas.openxmlformats.org/drawingml/2006/chart" r:id="R4e19542965fb4103"/>
+            <c:chart xmlns:r="http://schemas.openxmlformats.org/officeDocument/2006/relationships" xmlns:c="http://schemas.openxmlformats.org/drawingml/2006/chart" r:id="R65cdbbb55ee545bd"/>
           </a:graphicData>
         </a:graphic>
       </p:graphicFrame>
       <p:graphicFrame>
         <p:nvGraphicFramePr>
-          <p:cNvPr id="10002" name="stackedBar"/>
+          <p:cNvPr id="100002" name="stackedBar"/>
           <p:cNvGraphicFramePr/>
           <p:nvPr/>
         </p:nvGraphicFramePr>
@@ -5899,13 +5905,13 @@
         </p:xfrm>
         <a:graphic xmlns:a="http://schemas.openxmlformats.org/drawingml/2006/main">
           <a:graphicData uri="http://schemas.openxmlformats.org/drawingml/2006/chart">
-            <c:chart xmlns:r="http://schemas.openxmlformats.org/officeDocument/2006/relationships" xmlns:c="http://schemas.openxmlformats.org/drawingml/2006/chart" r:id="R9b2ebd681f074f33"/>
+            <c:chart xmlns:r="http://schemas.openxmlformats.org/officeDocument/2006/relationships" xmlns:c="http://schemas.openxmlformats.org/drawingml/2006/chart" r:id="R4ef1d936521c457a"/>
           </a:graphicData>
         </a:graphic>
       </p:graphicFrame>
       <p:graphicFrame>
         <p:nvGraphicFramePr>
-          <p:cNvPr id="10003" name="percentStackedBar"/>
+          <p:cNvPr id="100003" name="percentStackedBar"/>
           <p:cNvGraphicFramePr/>
           <p:nvPr/>
         </p:nvGraphicFramePr>
@@ -5915,13 +5921,13 @@
         </p:xfrm>
         <a:graphic xmlns:a="http://schemas.openxmlformats.org/drawingml/2006/main">
           <a:graphicData uri="http://schemas.openxmlformats.org/drawingml/2006/chart">
-            <c:chart xmlns:r="http://schemas.openxmlformats.org/officeDocument/2006/relationships" xmlns:c="http://schemas.openxmlformats.org/drawingml/2006/chart" r:id="R414d1c0c4fbf401b"/>
+            <c:chart xmlns:r="http://schemas.openxmlformats.org/officeDocument/2006/relationships" xmlns:c="http://schemas.openxmlformats.org/drawingml/2006/chart" r:id="R4b3d103efb324df9"/>
           </a:graphicData>
         </a:graphic>
       </p:graphicFrame>
       <p:graphicFrame>
         <p:nvGraphicFramePr>
-          <p:cNvPr id="10004" name="bar3d"/>
+          <p:cNvPr id="100004" name="bar3d"/>
           <p:cNvGraphicFramePr/>
           <p:nvPr/>
         </p:nvGraphicFramePr>
@@ -5931,7 +5937,7 @@
         </p:xfrm>
         <a:graphic xmlns:a="http://schemas.openxmlformats.org/drawingml/2006/main">
           <a:graphicData uri="http://schemas.openxmlformats.org/drawingml/2006/chart">
-            <c:chart xmlns:r="http://schemas.openxmlformats.org/officeDocument/2006/relationships" xmlns:c="http://schemas.openxmlformats.org/drawingml/2006/chart" r:id="R1d31d6ac46ea4afe"/>
+            <c:chart xmlns:r="http://schemas.openxmlformats.org/officeDocument/2006/relationships" xmlns:c="http://schemas.openxmlformats.org/drawingml/2006/chart" r:id="R056d40ec616a44f0"/>
           </a:graphicData>
         </a:graphic>
       </p:graphicFrame>
@@ -5952,8 +5958,8 @@
       <p:grpSpPr/>
       <p:sp>
         <p:nvSpPr>
-          <p:cNvPr id="10005" name="TextBox 1"/>
-          <p:cNvSpPr/>
+          <p:cNvPr id="100005" name="TextBox 1"/>
+          <p:cNvSpPr txBox="1"/>
           <p:nvPr/>
         </p:nvSpPr>
         <p:spPr>
@@ -5980,7 +5986,7 @@
       </p:sp>
       <p:graphicFrame>
         <p:nvGraphicFramePr>
-          <p:cNvPr id="10006" name="shape=box"/>
+          <p:cNvPr id="100006" name="shape=box"/>
           <p:cNvGraphicFramePr/>
           <p:nvPr/>
         </p:nvGraphicFramePr>
@@ -5990,13 +5996,13 @@
         </p:xfrm>
         <a:graphic xmlns:a="http://schemas.openxmlformats.org/drawingml/2006/main">
           <a:graphicData uri="http://schemas.openxmlformats.org/drawingml/2006/chart">
-            <c:chart xmlns:r="http://schemas.openxmlformats.org/officeDocument/2006/relationships" xmlns:c="http://schemas.openxmlformats.org/drawingml/2006/chart" r:id="Rbf17b56e2b1045f7"/>
+            <c:chart xmlns:r="http://schemas.openxmlformats.org/officeDocument/2006/relationships" xmlns:c="http://schemas.openxmlformats.org/drawingml/2006/chart" r:id="Rfb2a5aa7ec0a4973"/>
           </a:graphicData>
         </a:graphic>
       </p:graphicFrame>
       <p:graphicFrame>
         <p:nvGraphicFramePr>
-          <p:cNvPr id="10007" name="shape=cylinder"/>
+          <p:cNvPr id="100007" name="shape=cylinder"/>
           <p:cNvGraphicFramePr/>
           <p:nvPr/>
         </p:nvGraphicFramePr>
@@ -6006,13 +6012,13 @@
         </p:xfrm>
         <a:graphic xmlns:a="http://schemas.openxmlformats.org/drawingml/2006/main">
           <a:graphicData uri="http://schemas.openxmlformats.org/drawingml/2006/chart">
-            <c:chart xmlns:r="http://schemas.openxmlformats.org/officeDocument/2006/relationships" xmlns:c="http://schemas.openxmlformats.org/drawingml/2006/chart" r:id="R2bd4c21107eb4617"/>
+            <c:chart xmlns:r="http://schemas.openxmlformats.org/officeDocument/2006/relationships" xmlns:c="http://schemas.openxmlformats.org/drawingml/2006/chart" r:id="Re45e5ed9e45848a5"/>
           </a:graphicData>
         </a:graphic>
       </p:graphicFrame>
       <p:graphicFrame>
         <p:nvGraphicFramePr>
-          <p:cNvPr id="10008" name="shape=cone"/>
+          <p:cNvPr id="100008" name="shape=cone"/>
           <p:cNvGraphicFramePr/>
           <p:nvPr/>
         </p:nvGraphicFramePr>
@@ -6022,13 +6028,13 @@
         </p:xfrm>
         <a:graphic xmlns:a="http://schemas.openxmlformats.org/drawingml/2006/main">
           <a:graphicData uri="http://schemas.openxmlformats.org/drawingml/2006/chart">
-            <c:chart xmlns:r="http://schemas.openxmlformats.org/officeDocument/2006/relationships" xmlns:c="http://schemas.openxmlformats.org/drawingml/2006/chart" r:id="R2559df06d132494e"/>
+            <c:chart xmlns:r="http://schemas.openxmlformats.org/officeDocument/2006/relationships" xmlns:c="http://schemas.openxmlformats.org/drawingml/2006/chart" r:id="Rbf9ca93a7f2d48c3"/>
           </a:graphicData>
         </a:graphic>
       </p:graphicFrame>
       <p:graphicFrame>
         <p:nvGraphicFramePr>
-          <p:cNvPr id="10009" name="shape=pyramid"/>
+          <p:cNvPr id="100009" name="shape=pyramid"/>
           <p:cNvGraphicFramePr/>
           <p:nvPr/>
         </p:nvGraphicFramePr>
@@ -6038,7 +6044,7 @@
         </p:xfrm>
         <a:graphic xmlns:a="http://schemas.openxmlformats.org/drawingml/2006/main">
           <a:graphicData uri="http://schemas.openxmlformats.org/drawingml/2006/chart">
-            <c:chart xmlns:r="http://schemas.openxmlformats.org/officeDocument/2006/relationships" xmlns:c="http://schemas.openxmlformats.org/drawingml/2006/chart" r:id="Rab2b94ba1e024a8c"/>
+            <c:chart xmlns:r="http://schemas.openxmlformats.org/officeDocument/2006/relationships" xmlns:c="http://schemas.openxmlformats.org/drawingml/2006/chart" r:id="R07dfe71265ad453f"/>
           </a:graphicData>
         </a:graphic>
       </p:graphicFrame>
@@ -6059,8 +6065,8 @@
       <p:grpSpPr/>
       <p:sp>
         <p:nvSpPr>
-          <p:cNvPr id="10010" name="TextBox 1"/>
-          <p:cNvSpPr/>
+          <p:cNvPr id="100010" name="TextBox 1"/>
+          <p:cNvSpPr txBox="1"/>
           <p:nvPr/>
         </p:nvSpPr>
         <p:spPr>
@@ -6087,7 +6093,7 @@
       </p:sp>
       <p:graphicFrame>
         <p:nvGraphicFramePr>
-          <p:cNvPr id="10011" name="Styled title"/>
+          <p:cNvPr id="100011" name="Styled title"/>
           <p:cNvGraphicFramePr/>
           <p:nvPr/>
         </p:nvGraphicFramePr>
@@ -6097,13 +6103,13 @@
         </p:xfrm>
         <a:graphic xmlns:a="http://schemas.openxmlformats.org/drawingml/2006/main">
           <a:graphicData uri="http://schemas.openxmlformats.org/drawingml/2006/chart">
-            <c:chart xmlns:r="http://schemas.openxmlformats.org/officeDocument/2006/relationships" xmlns:c="http://schemas.openxmlformats.org/drawingml/2006/chart" r:id="R8a962951ecfc4a4b"/>
+            <c:chart xmlns:r="http://schemas.openxmlformats.org/officeDocument/2006/relationships" xmlns:c="http://schemas.openxmlformats.org/drawingml/2006/chart" r:id="R50dd20eac28a4a31"/>
           </a:graphicData>
         </a:graphic>
       </p:graphicFrame>
       <p:graphicFrame>
         <p:nvGraphicFramePr>
-          <p:cNvPr id="10012" name="legend=top + legendFont"/>
+          <p:cNvPr id="100012" name="legend=top + legendFont"/>
           <p:cNvGraphicFramePr/>
           <p:nvPr/>
         </p:nvGraphicFramePr>
@@ -6113,13 +6119,13 @@
         </p:xfrm>
         <a:graphic xmlns:a="http://schemas.openxmlformats.org/drawingml/2006/main">
           <a:graphicData uri="http://schemas.openxmlformats.org/drawingml/2006/chart">
-            <c:chart xmlns:r="http://schemas.openxmlformats.org/officeDocument/2006/relationships" xmlns:c="http://schemas.openxmlformats.org/drawingml/2006/chart" r:id="R7aa106ff59a5423e"/>
+            <c:chart xmlns:r="http://schemas.openxmlformats.org/officeDocument/2006/relationships" xmlns:c="http://schemas.openxmlformats.org/drawingml/2006/chart" r:id="R2bd7cba23bec4175"/>
           </a:graphicData>
         </a:graphic>
       </p:graphicFrame>
       <p:graphicFrame>
         <p:nvGraphicFramePr>
-          <p:cNvPr id="10013" name="legend.overlay=true"/>
+          <p:cNvPr id="100013" name="legend.overlay=true"/>
           <p:cNvGraphicFramePr/>
           <p:nvPr/>
         </p:nvGraphicFramePr>
@@ -6129,13 +6135,13 @@
         </p:xfrm>
         <a:graphic xmlns:a="http://schemas.openxmlformats.org/drawingml/2006/main">
           <a:graphicData uri="http://schemas.openxmlformats.org/drawingml/2006/chart">
-            <c:chart xmlns:r="http://schemas.openxmlformats.org/officeDocument/2006/relationships" xmlns:c="http://schemas.openxmlformats.org/drawingml/2006/chart" r:id="Ra360b022da0d4b95"/>
+            <c:chart xmlns:r="http://schemas.openxmlformats.org/officeDocument/2006/relationships" xmlns:c="http://schemas.openxmlformats.org/drawingml/2006/chart" r:id="Rdc9d02acc9a8451a"/>
           </a:graphicData>
         </a:graphic>
       </p:graphicFrame>
       <p:graphicFrame>
         <p:nvGraphicFramePr>
-          <p:cNvPr id="10014" name="Chart 4"/>
+          <p:cNvPr id="100014" name="Chart 4"/>
           <p:cNvGraphicFramePr/>
           <p:nvPr/>
         </p:nvGraphicFramePr>
@@ -6145,7 +6151,7 @@
         </p:xfrm>
         <a:graphic xmlns:a="http://schemas.openxmlformats.org/drawingml/2006/main">
           <a:graphicData uri="http://schemas.openxmlformats.org/drawingml/2006/chart">
-            <c:chart xmlns:r="http://schemas.openxmlformats.org/officeDocument/2006/relationships" xmlns:c="http://schemas.openxmlformats.org/drawingml/2006/chart" r:id="Ra93cf193219e418e"/>
+            <c:chart xmlns:r="http://schemas.openxmlformats.org/officeDocument/2006/relationships" xmlns:c="http://schemas.openxmlformats.org/drawingml/2006/chart" r:id="Rf5e100d114e746b0"/>
           </a:graphicData>
         </a:graphic>
       </p:graphicFrame>
@@ -6166,8 +6172,8 @@
       <p:grpSpPr/>
       <p:sp>
         <p:nvSpPr>
-          <p:cNvPr id="10015" name="TextBox 1"/>
-          <p:cNvSpPr/>
+          <p:cNvPr id="100015" name="TextBox 1"/>
+          <p:cNvSpPr txBox="1"/>
           <p:nvPr/>
         </p:nvSpPr>
         <p:spPr>
@@ -6194,7 +6200,7 @@
       </p:sp>
       <p:graphicFrame>
         <p:nvGraphicFramePr>
-          <p:cNvPr id="10016" name="value @ outsideEnd"/>
+          <p:cNvPr id="100016" name="value @ outsideEnd"/>
           <p:cNvGraphicFramePr/>
           <p:nvPr/>
         </p:nvGraphicFramePr>
@@ -6204,13 +6210,13 @@
         </p:xfrm>
         <a:graphic xmlns:a="http://schemas.openxmlformats.org/drawingml/2006/main">
           <a:graphicData uri="http://schemas.openxmlformats.org/drawingml/2006/chart">
-            <c:chart xmlns:r="http://schemas.openxmlformats.org/officeDocument/2006/relationships" xmlns:c="http://schemas.openxmlformats.org/drawingml/2006/chart" r:id="R60bcdf4fdc3646c2"/>
+            <c:chart xmlns:r="http://schemas.openxmlformats.org/officeDocument/2006/relationships" xmlns:c="http://schemas.openxmlformats.org/drawingml/2006/chart" r:id="R5a5e2202a5514cce"/>
           </a:graphicData>
         </a:graphic>
       </p:graphicFrame>
       <p:graphicFrame>
         <p:nvGraphicFramePr>
-          <p:cNvPr id="10017" name="value,category @ insideEnd"/>
+          <p:cNvPr id="100017" name="value,category @ insideEnd"/>
           <p:cNvGraphicFramePr/>
           <p:nvPr/>
         </p:nvGraphicFramePr>
@@ -6220,13 +6226,13 @@
         </p:xfrm>
         <a:graphic xmlns:a="http://schemas.openxmlformats.org/drawingml/2006/main">
           <a:graphicData uri="http://schemas.openxmlformats.org/drawingml/2006/chart">
-            <c:chart xmlns:r="http://schemas.openxmlformats.org/officeDocument/2006/relationships" xmlns:c="http://schemas.openxmlformats.org/drawingml/2006/chart" r:id="R0d1a8ece6ee3483b"/>
+            <c:chart xmlns:r="http://schemas.openxmlformats.org/officeDocument/2006/relationships" xmlns:c="http://schemas.openxmlformats.org/drawingml/2006/chart" r:id="Rae128510398340bf"/>
           </a:graphicData>
         </a:graphic>
       </p:graphicFrame>
       <p:graphicFrame>
         <p:nvGraphicFramePr>
-          <p:cNvPr id="10018" name="stacked + center labels"/>
+          <p:cNvPr id="100018" name="stacked + center labels"/>
           <p:cNvGraphicFramePr/>
           <p:nvPr/>
         </p:nvGraphicFramePr>
@@ -6236,13 +6242,13 @@
         </p:xfrm>
         <a:graphic xmlns:a="http://schemas.openxmlformats.org/drawingml/2006/main">
           <a:graphicData uri="http://schemas.openxmlformats.org/drawingml/2006/chart">
-            <c:chart xmlns:r="http://schemas.openxmlformats.org/officeDocument/2006/relationships" xmlns:c="http://schemas.openxmlformats.org/drawingml/2006/chart" r:id="R44d36e9dab3c4130"/>
+            <c:chart xmlns:r="http://schemas.openxmlformats.org/officeDocument/2006/relationships" xmlns:c="http://schemas.openxmlformats.org/drawingml/2006/chart" r:id="Rd8206cf88c3c4f2f"/>
           </a:graphicData>
         </a:graphic>
       </p:graphicFrame>
       <p:graphicFrame>
         <p:nvGraphicFramePr>
-          <p:cNvPr id="10019" name="dataLabels=none"/>
+          <p:cNvPr id="100019" name="dataLabels=none"/>
           <p:cNvGraphicFramePr/>
           <p:nvPr/>
         </p:nvGraphicFramePr>
@@ -6252,7 +6258,7 @@
         </p:xfrm>
         <a:graphic xmlns:a="http://schemas.openxmlformats.org/drawingml/2006/main">
           <a:graphicData uri="http://schemas.openxmlformats.org/drawingml/2006/chart">
-            <c:chart xmlns:r="http://schemas.openxmlformats.org/officeDocument/2006/relationships" xmlns:c="http://schemas.openxmlformats.org/drawingml/2006/chart" r:id="R70010f4f823e4a95"/>
+            <c:chart xmlns:r="http://schemas.openxmlformats.org/officeDocument/2006/relationships" xmlns:c="http://schemas.openxmlformats.org/drawingml/2006/chart" r:id="Ra8b80cad77e948bf"/>
           </a:graphicData>
         </a:graphic>
       </p:graphicFrame>
@@ -6273,8 +6279,8 @@
       <p:grpSpPr/>
       <p:sp>
         <p:nvSpPr>
-          <p:cNvPr id="10020" name="TextBox 1"/>
-          <p:cNvSpPr/>
+          <p:cNvPr id="100020" name="TextBox 1"/>
+          <p:cNvSpPr txBox="1"/>
           <p:nvPr/>
         </p:nvSpPr>
         <p:spPr>
@@ -6301,7 +6307,7 @@
       </p:sp>
       <p:graphicFrame>
         <p:nvGraphicFramePr>
-          <p:cNvPr id="10021" name="min/max + titles + numfmt"/>
+          <p:cNvPr id="100021" name="min/max + titles + numfmt"/>
           <p:cNvGraphicFramePr/>
           <p:nvPr/>
         </p:nvGraphicFramePr>
@@ -6311,13 +6317,13 @@
         </p:xfrm>
         <a:graphic xmlns:a="http://schemas.openxmlformats.org/drawingml/2006/main">
           <a:graphicData uri="http://schemas.openxmlformats.org/drawingml/2006/chart">
-            <c:chart xmlns:r="http://schemas.openxmlformats.org/officeDocument/2006/relationships" xmlns:c="http://schemas.openxmlformats.org/drawingml/2006/chart" r:id="R4261648b8020409e"/>
+            <c:chart xmlns:r="http://schemas.openxmlformats.org/officeDocument/2006/relationships" xmlns:c="http://schemas.openxmlformats.org/drawingml/2006/chart" r:id="R02b1e75e97a941a6"/>
           </a:graphicData>
         </a:graphic>
       </p:graphicFrame>
       <p:graphicFrame>
         <p:nvGraphicFramePr>
-          <p:cNvPr id="10022" name="gridlines + ticks"/>
+          <p:cNvPr id="100022" name="gridlines + ticks"/>
           <p:cNvGraphicFramePr/>
           <p:nvPr/>
         </p:nvGraphicFramePr>
@@ -6327,13 +6333,13 @@
         </p:xfrm>
         <a:graphic xmlns:a="http://schemas.openxmlformats.org/drawingml/2006/main">
           <a:graphicData uri="http://schemas.openxmlformats.org/drawingml/2006/chart">
-            <c:chart xmlns:r="http://schemas.openxmlformats.org/officeDocument/2006/relationships" xmlns:c="http://schemas.openxmlformats.org/drawingml/2006/chart" r:id="Rd2a80b5580e448c4"/>
+            <c:chart xmlns:r="http://schemas.openxmlformats.org/officeDocument/2006/relationships" xmlns:c="http://schemas.openxmlformats.org/drawingml/2006/chart" r:id="Recb9379649ba42a5"/>
           </a:graphicData>
         </a:graphic>
       </p:graphicFrame>
       <p:graphicFrame>
         <p:nvGraphicFramePr>
-          <p:cNvPr id="10023" name="labelrotation=-30"/>
+          <p:cNvPr id="100023" name="labelrotation=-30"/>
           <p:cNvGraphicFramePr/>
           <p:nvPr/>
         </p:nvGraphicFramePr>
@@ -6343,13 +6349,13 @@
         </p:xfrm>
         <a:graphic xmlns:a="http://schemas.openxmlformats.org/drawingml/2006/main">
           <a:graphicData uri="http://schemas.openxmlformats.org/drawingml/2006/chart">
-            <c:chart xmlns:r="http://schemas.openxmlformats.org/officeDocument/2006/relationships" xmlns:c="http://schemas.openxmlformats.org/drawingml/2006/chart" r:id="Rb3633d7b29844107"/>
+            <c:chart xmlns:r="http://schemas.openxmlformats.org/officeDocument/2006/relationships" xmlns:c="http://schemas.openxmlformats.org/drawingml/2006/chart" r:id="Rd9a5a41ae1f043b9"/>
           </a:graphicData>
         </a:graphic>
       </p:graphicFrame>
       <p:graphicFrame>
         <p:nvGraphicFramePr>
-          <p:cNvPr id="10024" name="dispunits=thousands"/>
+          <p:cNvPr id="100024" name="dispunits=thousands"/>
           <p:cNvGraphicFramePr/>
           <p:nvPr/>
         </p:nvGraphicFramePr>
@@ -6359,7 +6365,7 @@
         </p:xfrm>
         <a:graphic xmlns:a="http://schemas.openxmlformats.org/drawingml/2006/main">
           <a:graphicData uri="http://schemas.openxmlformats.org/drawingml/2006/chart">
-            <c:chart xmlns:r="http://schemas.openxmlformats.org/officeDocument/2006/relationships" xmlns:c="http://schemas.openxmlformats.org/drawingml/2006/chart" r:id="R32cb5c737ed4438f"/>
+            <c:chart xmlns:r="http://schemas.openxmlformats.org/officeDocument/2006/relationships" xmlns:c="http://schemas.openxmlformats.org/drawingml/2006/chart" r:id="R521bff4e3b3b4440"/>
           </a:graphicData>
         </a:graphic>
       </p:graphicFrame>
@@ -6380,8 +6386,8 @@
       <p:grpSpPr/>
       <p:sp>
         <p:nvSpPr>
-          <p:cNvPr id="10025" name="TextBox 1"/>
-          <p:cNvSpPr/>
+          <p:cNvPr id="100025" name="TextBox 1"/>
+          <p:cNvSpPr txBox="1"/>
           <p:nvPr/>
         </p:nvSpPr>
         <p:spPr>
@@ -6408,7 +6414,7 @@
       </p:sp>
       <p:graphicFrame>
         <p:nvGraphicFramePr>
-          <p:cNvPr id="10026" name="colors + seriesoutline"/>
+          <p:cNvPr id="100026" name="colors + seriesoutline"/>
           <p:cNvGraphicFramePr/>
           <p:nvPr/>
         </p:nvGraphicFramePr>
@@ -6418,13 +6424,13 @@
         </p:xfrm>
         <a:graphic xmlns:a="http://schemas.openxmlformats.org/drawingml/2006/main">
           <a:graphicData uri="http://schemas.openxmlformats.org/drawingml/2006/chart">
-            <c:chart xmlns:r="http://schemas.openxmlformats.org/officeDocument/2006/relationships" xmlns:c="http://schemas.openxmlformats.org/drawingml/2006/chart" r:id="Rd64825ad1a344a6b"/>
+            <c:chart xmlns:r="http://schemas.openxmlformats.org/officeDocument/2006/relationships" xmlns:c="http://schemas.openxmlformats.org/drawingml/2006/chart" r:id="R08e28f7e0c6f44b2"/>
           </a:graphicData>
         </a:graphic>
       </p:graphicFrame>
       <p:graphicFrame>
         <p:nvGraphicFramePr>
-          <p:cNvPr id="10027" name="gradient + seriesshadow"/>
+          <p:cNvPr id="100027" name="gradient + seriesshadow"/>
           <p:cNvGraphicFramePr/>
           <p:nvPr/>
         </p:nvGraphicFramePr>
@@ -6434,13 +6440,13 @@
         </p:xfrm>
         <a:graphic xmlns:a="http://schemas.openxmlformats.org/drawingml/2006/main">
           <a:graphicData uri="http://schemas.openxmlformats.org/drawingml/2006/chart">
-            <c:chart xmlns:r="http://schemas.openxmlformats.org/officeDocument/2006/relationships" xmlns:c="http://schemas.openxmlformats.org/drawingml/2006/chart" r:id="Raa4532458d8a4098"/>
+            <c:chart xmlns:r="http://schemas.openxmlformats.org/officeDocument/2006/relationships" xmlns:c="http://schemas.openxmlformats.org/drawingml/2006/chart" r:id="R54fa2b543bec43e0"/>
           </a:graphicData>
         </a:graphic>
       </p:graphicFrame>
       <p:graphicFrame>
         <p:nvGraphicFramePr>
-          <p:cNvPr id="10028" name="transparency=30 + gradients"/>
+          <p:cNvPr id="100028" name="transparency=30 + gradients"/>
           <p:cNvGraphicFramePr/>
           <p:nvPr/>
         </p:nvGraphicFramePr>
@@ -6450,13 +6456,13 @@
         </p:xfrm>
         <a:graphic xmlns:a="http://schemas.openxmlformats.org/drawingml/2006/main">
           <a:graphicData uri="http://schemas.openxmlformats.org/drawingml/2006/chart">
-            <c:chart xmlns:r="http://schemas.openxmlformats.org/officeDocument/2006/relationships" xmlns:c="http://schemas.openxmlformats.org/drawingml/2006/chart" r:id="Ra21bbf5b36994ed5"/>
+            <c:chart xmlns:r="http://schemas.openxmlformats.org/officeDocument/2006/relationships" xmlns:c="http://schemas.openxmlformats.org/drawingml/2006/chart" r:id="Reccca1c1ed3e4e1e"/>
           </a:graphicData>
         </a:graphic>
       </p:graphicFrame>
       <p:graphicFrame>
         <p:nvGraphicFramePr>
-          <p:cNvPr id="10029" name="stacked + serlines=true"/>
+          <p:cNvPr id="100029" name="stacked + serlines=true"/>
           <p:cNvGraphicFramePr/>
           <p:nvPr/>
         </p:nvGraphicFramePr>
@@ -6466,7 +6472,7 @@
         </p:xfrm>
         <a:graphic xmlns:a="http://schemas.openxmlformats.org/drawingml/2006/main">
           <a:graphicData uri="http://schemas.openxmlformats.org/drawingml/2006/chart">
-            <c:chart xmlns:r="http://schemas.openxmlformats.org/officeDocument/2006/relationships" xmlns:c="http://schemas.openxmlformats.org/drawingml/2006/chart" r:id="Rfbfc60fbb77b4fe2"/>
+            <c:chart xmlns:r="http://schemas.openxmlformats.org/officeDocument/2006/relationships" xmlns:c="http://schemas.openxmlformats.org/drawingml/2006/chart" r:id="R8c277071a47f4698"/>
           </a:graphicData>
         </a:graphic>
       </p:graphicFrame>
@@ -6487,8 +6493,8 @@
       <p:grpSpPr/>
       <p:sp>
         <p:nvSpPr>
-          <p:cNvPr id="10030" name="TextBox 1"/>
-          <p:cNvSpPr/>
+          <p:cNvPr id="100030" name="TextBox 1"/>
+          <p:cNvSpPr txBox="1"/>
           <p:nvPr/>
         </p:nvSpPr>
         <p:spPr>
@@ -6515,7 +6521,7 @@
       </p:sp>
       <p:graphicFrame>
         <p:nvGraphicFramePr>
-          <p:cNvPr id="10031" name="referenceline=100"/>
+          <p:cNvPr id="100031" name="referenceline=100"/>
           <p:cNvGraphicFramePr/>
           <p:nvPr/>
         </p:nvGraphicFramePr>
@@ -6525,13 +6531,13 @@
         </p:xfrm>
         <a:graphic xmlns:a="http://schemas.openxmlformats.org/drawingml/2006/main">
           <a:graphicData uri="http://schemas.openxmlformats.org/drawingml/2006/chart">
-            <c:chart xmlns:r="http://schemas.openxmlformats.org/officeDocument/2006/relationships" xmlns:c="http://schemas.openxmlformats.org/drawingml/2006/chart" r:id="Rdf040023797948a3"/>
+            <c:chart xmlns:r="http://schemas.openxmlformats.org/officeDocument/2006/relationships" xmlns:c="http://schemas.openxmlformats.org/drawingml/2006/chart" r:id="R9844c95867534fbe"/>
           </a:graphicData>
         </a:graphic>
       </p:graphicFrame>
       <p:graphicFrame>
         <p:nvGraphicFramePr>
-          <p:cNvPr id="10032" name="errbars=fixedVal:10"/>
+          <p:cNvPr id="100032" name="errbars=fixedVal:10"/>
           <p:cNvGraphicFramePr/>
           <p:nvPr/>
         </p:nvGraphicFramePr>
@@ -6541,13 +6547,13 @@
         </p:xfrm>
         <a:graphic xmlns:a="http://schemas.openxmlformats.org/drawingml/2006/main">
           <a:graphicData uri="http://schemas.openxmlformats.org/drawingml/2006/chart">
-            <c:chart xmlns:r="http://schemas.openxmlformats.org/officeDocument/2006/relationships" xmlns:c="http://schemas.openxmlformats.org/drawingml/2006/chart" r:id="Rd6d8297e8107419b"/>
+            <c:chart xmlns:r="http://schemas.openxmlformats.org/officeDocument/2006/relationships" xmlns:c="http://schemas.openxmlformats.org/drawingml/2006/chart" r:id="R0d8ec55d14d046be"/>
           </a:graphicData>
         </a:graphic>
       </p:graphicFrame>
       <p:graphicFrame>
         <p:nvGraphicFramePr>
-          <p:cNvPr id="10033" name="gapwidth=50 + overlap=20"/>
+          <p:cNvPr id="100033" name="gapwidth=50 + overlap=20"/>
           <p:cNvGraphicFramePr/>
           <p:nvPr/>
         </p:nvGraphicFramePr>
@@ -6557,13 +6563,13 @@
         </p:xfrm>
         <a:graphic xmlns:a="http://schemas.openxmlformats.org/drawingml/2006/main">
           <a:graphicData uri="http://schemas.openxmlformats.org/drawingml/2006/chart">
-            <c:chart xmlns:r="http://schemas.openxmlformats.org/officeDocument/2006/relationships" xmlns:c="http://schemas.openxmlformats.org/drawingml/2006/chart" r:id="Rff5226b3d63846d9"/>
+            <c:chart xmlns:r="http://schemas.openxmlformats.org/officeDocument/2006/relationships" xmlns:c="http://schemas.openxmlformats.org/drawingml/2006/chart" r:id="Rab37f51d0475482c"/>
           </a:graphicData>
         </a:graphic>
       </p:graphicFrame>
       <p:graphicFrame>
         <p:nvGraphicFramePr>
-          <p:cNvPr id="10034" name="dataTable=true"/>
+          <p:cNvPr id="100034" name="dataTable=true"/>
           <p:cNvGraphicFramePr/>
           <p:nvPr/>
         </p:nvGraphicFramePr>
@@ -6573,7 +6579,7 @@
         </p:xfrm>
         <a:graphic xmlns:a="http://schemas.openxmlformats.org/drawingml/2006/main">
           <a:graphicData uri="http://schemas.openxmlformats.org/drawingml/2006/chart">
-            <c:chart xmlns:r="http://schemas.openxmlformats.org/officeDocument/2006/relationships" xmlns:c="http://schemas.openxmlformats.org/drawingml/2006/chart" r:id="R8271ff38e6a3427c"/>
+            <c:chart xmlns:r="http://schemas.openxmlformats.org/officeDocument/2006/relationships" xmlns:c="http://schemas.openxmlformats.org/drawingml/2006/chart" r:id="Re4847d28cafa4e22"/>
           </a:graphicData>
         </a:graphic>
       </p:graphicFrame>
@@ -6594,8 +6600,8 @@
       <p:grpSpPr/>
       <p:sp>
         <p:nvSpPr>
-          <p:cNvPr id="10035" name="TextBox 1"/>
-          <p:cNvSpPr/>
+          <p:cNvPr id="100035" name="TextBox 1"/>
+          <p:cNvSpPr txBox="1"/>
           <p:nvPr/>
         </p:nvSpPr>
         <p:spPr>
@@ -6622,7 +6628,7 @@
       </p:sp>
       <p:graphicFrame>
         <p:nvGraphicFramePr>
-          <p:cNvPr id="10036" name="preset=minimal"/>
+          <p:cNvPr id="100036" name="preset=minimal"/>
           <p:cNvGraphicFramePr/>
           <p:nvPr/>
         </p:nvGraphicFramePr>
@@ -6632,13 +6638,13 @@
         </p:xfrm>
         <a:graphic xmlns:a="http://schemas.openxmlformats.org/drawingml/2006/main">
           <a:graphicData uri="http://schemas.openxmlformats.org/drawingml/2006/chart">
-            <c:chart xmlns:r="http://schemas.openxmlformats.org/officeDocument/2006/relationships" xmlns:c="http://schemas.openxmlformats.org/drawingml/2006/chart" r:id="Re1f7d17c7d734479"/>
+            <c:chart xmlns:r="http://schemas.openxmlformats.org/officeDocument/2006/relationships" xmlns:c="http://schemas.openxmlformats.org/drawingml/2006/chart" r:id="Re44e70fcad6e402c"/>
           </a:graphicData>
         </a:graphic>
       </p:graphicFrame>
       <p:graphicFrame>
         <p:nvGraphicFramePr>
-          <p:cNvPr id="10037" name="preset=dark"/>
+          <p:cNvPr id="100037" name="preset=dark"/>
           <p:cNvGraphicFramePr/>
           <p:nvPr/>
         </p:nvGraphicFramePr>
@@ -6648,13 +6654,13 @@
         </p:xfrm>
         <a:graphic xmlns:a="http://schemas.openxmlformats.org/drawingml/2006/main">
           <a:graphicData uri="http://schemas.openxmlformats.org/drawingml/2006/chart">
-            <c:chart xmlns:r="http://schemas.openxmlformats.org/officeDocument/2006/relationships" xmlns:c="http://schemas.openxmlformats.org/drawingml/2006/chart" r:id="R7c7df5897ee6485e"/>
+            <c:chart xmlns:r="http://schemas.openxmlformats.org/officeDocument/2006/relationships" xmlns:c="http://schemas.openxmlformats.org/drawingml/2006/chart" r:id="R4b084c7d602e452e"/>
           </a:graphicData>
         </a:graphic>
       </p:graphicFrame>
       <p:graphicFrame>
         <p:nvGraphicFramePr>
-          <p:cNvPr id="10038" name="preset=corporate"/>
+          <p:cNvPr id="100038" name="preset=corporate"/>
           <p:cNvGraphicFramePr/>
           <p:nvPr/>
         </p:nvGraphicFramePr>
@@ -6664,13 +6670,13 @@
         </p:xfrm>
         <a:graphic xmlns:a="http://schemas.openxmlformats.org/drawingml/2006/main">
           <a:graphicData uri="http://schemas.openxmlformats.org/drawingml/2006/chart">
-            <c:chart xmlns:r="http://schemas.openxmlformats.org/officeDocument/2006/relationships" xmlns:c="http://schemas.openxmlformats.org/drawingml/2006/chart" r:id="R9efab9c67dd444e7"/>
+            <c:chart xmlns:r="http://schemas.openxmlformats.org/officeDocument/2006/relationships" xmlns:c="http://schemas.openxmlformats.org/drawingml/2006/chart" r:id="R3f610ed0bc354864"/>
           </a:graphicData>
         </a:graphic>
       </p:graphicFrame>
       <p:graphicFrame>
         <p:nvGraphicFramePr>
-          <p:cNvPr id="10039" name="seriesN.* Add + chart-series Set"/>
+          <p:cNvPr id="100039" name="seriesN.* Add + chart-series Set"/>
           <p:cNvGraphicFramePr/>
           <p:nvPr/>
         </p:nvGraphicFramePr>
@@ -6680,7 +6686,7 @@
         </p:xfrm>
         <a:graphic xmlns:a="http://schemas.openxmlformats.org/drawingml/2006/main">
           <a:graphicData uri="http://schemas.openxmlformats.org/drawingml/2006/chart">
-            <c:chart xmlns:r="http://schemas.openxmlformats.org/officeDocument/2006/relationships" xmlns:c="http://schemas.openxmlformats.org/drawingml/2006/chart" r:id="R33107efe9a6c4a8a"/>
+            <c:chart xmlns:r="http://schemas.openxmlformats.org/officeDocument/2006/relationships" xmlns:c="http://schemas.openxmlformats.org/drawingml/2006/chart" r:id="R8d520af2ea8a48bf"/>
           </a:graphicData>
         </a:graphic>
       </p:graphicFrame>
